--- a/chapter3/ASE_3_PSP_Career.pptx
+++ b/chapter3/ASE_3_PSP_Career.pptx
@@ -200,16 +200,47 @@
 </p:presentation>
 </file>
 
-<file path=ppt/revisionInfo.xml><?xml version="1.0" encoding="utf-8"?>
-<p1510:revInfo xmlns:a="http://schemas.openxmlformats.org/drawingml/2006/main" xmlns:r="http://schemas.openxmlformats.org/officeDocument/2006/relationships" xmlns:p1510="http://schemas.microsoft.com/office/powerpoint/2015/10/main">
-  <p1510:revLst>
-    <p1510:client id="{B2671A2C-B444-47B6-830B-E020D46D4C77}" v="12" dt="2019-09-04T03:53:25.106"/>
-  </p1510:revLst>
-</p1510:revInfo>
-</file>
-
 <file path=ppt/changesInfos/changesInfo1.xml><?xml version="1.0" encoding="utf-8"?>
 <pc:chgInfo xmlns:a="http://schemas.openxmlformats.org/drawingml/2006/main" xmlns:r="http://schemas.openxmlformats.org/officeDocument/2006/relationships" xmlns:ac="http://schemas.microsoft.com/office/drawing/2013/main/command" xmlns:pc="http://schemas.microsoft.com/office/powerpoint/2013/main/command">
+  <pc:docChgLst>
+    <pc:chgData name="Xin Zou" userId="260b9726081dae15" providerId="LiveId" clId="{9D297BCE-98D2-4025-9670-F2ABFDE5436C}"/>
+    <pc:docChg chg="modSld">
+      <pc:chgData name="Xin Zou" userId="260b9726081dae15" providerId="LiveId" clId="{9D297BCE-98D2-4025-9670-F2ABFDE5436C}" dt="2025-10-15T11:35:36.260" v="7" actId="20577"/>
+      <pc:docMkLst>
+        <pc:docMk/>
+      </pc:docMkLst>
+      <pc:sldChg chg="modSp mod">
+        <pc:chgData name="Xin Zou" userId="260b9726081dae15" providerId="LiveId" clId="{9D297BCE-98D2-4025-9670-F2ABFDE5436C}" dt="2025-10-15T11:34:58.298" v="0" actId="20577"/>
+        <pc:sldMkLst>
+          <pc:docMk/>
+          <pc:sldMk cId="0" sldId="282"/>
+        </pc:sldMkLst>
+        <pc:spChg chg="mod">
+          <ac:chgData name="Xin Zou" userId="260b9726081dae15" providerId="LiveId" clId="{9D297BCE-98D2-4025-9670-F2ABFDE5436C}" dt="2025-10-15T11:34:58.298" v="0" actId="20577"/>
+          <ac:spMkLst>
+            <pc:docMk/>
+            <pc:sldMk cId="0" sldId="282"/>
+            <ac:spMk id="2" creationId="{00000000-0000-0000-0000-000000000000}"/>
+          </ac:spMkLst>
+        </pc:spChg>
+      </pc:sldChg>
+      <pc:sldChg chg="modSp mod">
+        <pc:chgData name="Xin Zou" userId="260b9726081dae15" providerId="LiveId" clId="{9D297BCE-98D2-4025-9670-F2ABFDE5436C}" dt="2025-10-15T11:35:36.260" v="7" actId="20577"/>
+        <pc:sldMkLst>
+          <pc:docMk/>
+          <pc:sldMk cId="852070667" sldId="312"/>
+        </pc:sldMkLst>
+        <pc:spChg chg="mod">
+          <ac:chgData name="Xin Zou" userId="260b9726081dae15" providerId="LiveId" clId="{9D297BCE-98D2-4025-9670-F2ABFDE5436C}" dt="2025-10-15T11:35:36.260" v="7" actId="20577"/>
+          <ac:spMkLst>
+            <pc:docMk/>
+            <pc:sldMk cId="852070667" sldId="312"/>
+            <ac:spMk id="2" creationId="{3CAD3260-D3B2-467A-9605-1567B03BC767}"/>
+          </ac:spMkLst>
+        </pc:spChg>
+      </pc:sldChg>
+    </pc:docChg>
+  </pc:docChgLst>
   <pc:docChgLst>
     <pc:chgData name="Xin Zou" userId="260b9726081dae15" providerId="LiveId" clId="{FE08A991-EB5C-498E-983D-97A2BE0F5BFB}"/>
     <pc:docChg chg="undo custSel addSld delSld modSld modMainMaster">
@@ -223,22 +254,6 @@
           <pc:docMk/>
           <pc:sldMk cId="0" sldId="256"/>
         </pc:sldMkLst>
-        <pc:spChg chg="mod">
-          <ac:chgData name="Xin Zou" userId="260b9726081dae15" providerId="LiveId" clId="{FE08A991-EB5C-498E-983D-97A2BE0F5BFB}" dt="2018-10-03T21:56:38.388" v="5469"/>
-          <ac:spMkLst>
-            <pc:docMk/>
-            <pc:sldMk cId="0" sldId="256"/>
-            <ac:spMk id="2" creationId="{00000000-0000-0000-0000-000000000000}"/>
-          </ac:spMkLst>
-        </pc:spChg>
-        <pc:spChg chg="mod">
-          <ac:chgData name="Xin Zou" userId="260b9726081dae15" providerId="LiveId" clId="{FE08A991-EB5C-498E-983D-97A2BE0F5BFB}" dt="2018-10-08T05:56:17.663" v="9126" actId="27636"/>
-          <ac:spMkLst>
-            <pc:docMk/>
-            <pc:sldMk cId="0" sldId="256"/>
-            <ac:spMk id="9219" creationId="{00000000-0000-0000-0000-000000000000}"/>
-          </ac:spMkLst>
-        </pc:spChg>
       </pc:sldChg>
       <pc:sldChg chg="modSp">
         <pc:chgData name="Xin Zou" userId="260b9726081dae15" providerId="LiveId" clId="{FE08A991-EB5C-498E-983D-97A2BE0F5BFB}" dt="2018-10-03T05:04:11.756" v="1999" actId="113"/>
@@ -246,22 +261,6 @@
           <pc:docMk/>
           <pc:sldMk cId="0" sldId="265"/>
         </pc:sldMkLst>
-        <pc:spChg chg="mod">
-          <ac:chgData name="Xin Zou" userId="260b9726081dae15" providerId="LiveId" clId="{FE08A991-EB5C-498E-983D-97A2BE0F5BFB}" dt="2018-10-03T05:04:11.756" v="1999" actId="113"/>
-          <ac:spMkLst>
-            <pc:docMk/>
-            <pc:sldMk cId="0" sldId="265"/>
-            <ac:spMk id="3" creationId="{00000000-0000-0000-0000-000000000000}"/>
-          </ac:spMkLst>
-        </pc:spChg>
-        <pc:spChg chg="mod">
-          <ac:chgData name="Xin Zou" userId="260b9726081dae15" providerId="LiveId" clId="{FE08A991-EB5C-498E-983D-97A2BE0F5BFB}" dt="2018-10-03T04:45:41.888" v="1775"/>
-          <ac:spMkLst>
-            <pc:docMk/>
-            <pc:sldMk cId="0" sldId="265"/>
-            <ac:spMk id="11266" creationId="{00000000-0000-0000-0000-000000000000}"/>
-          </ac:spMkLst>
-        </pc:spChg>
       </pc:sldChg>
       <pc:sldChg chg="modSp modAnim">
         <pc:chgData name="Xin Zou" userId="260b9726081dae15" providerId="LiveId" clId="{FE08A991-EB5C-498E-983D-97A2BE0F5BFB}" dt="2018-10-03T05:20:17.647" v="4910"/>
@@ -269,22 +268,6 @@
           <pc:docMk/>
           <pc:sldMk cId="0" sldId="270"/>
         </pc:sldMkLst>
-        <pc:spChg chg="mod">
-          <ac:chgData name="Xin Zou" userId="260b9726081dae15" providerId="LiveId" clId="{FE08A991-EB5C-498E-983D-97A2BE0F5BFB}" dt="2018-10-03T05:20:17.647" v="4910"/>
-          <ac:spMkLst>
-            <pc:docMk/>
-            <pc:sldMk cId="0" sldId="270"/>
-            <ac:spMk id="2" creationId="{00000000-0000-0000-0000-000000000000}"/>
-          </ac:spMkLst>
-        </pc:spChg>
-        <pc:spChg chg="mod">
-          <ac:chgData name="Xin Zou" userId="260b9726081dae15" providerId="LiveId" clId="{FE08A991-EB5C-498E-983D-97A2BE0F5BFB}" dt="2018-10-03T05:12:29.861" v="3046" actId="2711"/>
-          <ac:spMkLst>
-            <pc:docMk/>
-            <pc:sldMk cId="0" sldId="270"/>
-            <ac:spMk id="3" creationId="{00000000-0000-0000-0000-000000000000}"/>
-          </ac:spMkLst>
-        </pc:spChg>
       </pc:sldChg>
       <pc:sldChg chg="modSp">
         <pc:chgData name="Xin Zou" userId="260b9726081dae15" providerId="LiveId" clId="{FE08A991-EB5C-498E-983D-97A2BE0F5BFB}" dt="2018-10-04T00:10:21.628" v="7051"/>
@@ -292,22 +275,6 @@
           <pc:docMk/>
           <pc:sldMk cId="0" sldId="271"/>
         </pc:sldMkLst>
-        <pc:spChg chg="mod">
-          <ac:chgData name="Xin Zou" userId="260b9726081dae15" providerId="LiveId" clId="{FE08A991-EB5C-498E-983D-97A2BE0F5BFB}" dt="2018-10-04T00:10:21.628" v="7051"/>
-          <ac:spMkLst>
-            <pc:docMk/>
-            <pc:sldMk cId="0" sldId="271"/>
-            <ac:spMk id="2" creationId="{00000000-0000-0000-0000-000000000000}"/>
-          </ac:spMkLst>
-        </pc:spChg>
-        <pc:picChg chg="mod">
-          <ac:chgData name="Xin Zou" userId="260b9726081dae15" providerId="LiveId" clId="{FE08A991-EB5C-498E-983D-97A2BE0F5BFB}" dt="2018-10-04T00:10:21.628" v="7051"/>
-          <ac:picMkLst>
-            <pc:docMk/>
-            <pc:sldMk cId="0" sldId="271"/>
-            <ac:picMk id="1027" creationId="{00000000-0000-0000-0000-000000000000}"/>
-          </ac:picMkLst>
-        </pc:picChg>
       </pc:sldChg>
       <pc:sldChg chg="modSp modAnim">
         <pc:chgData name="Xin Zou" userId="260b9726081dae15" providerId="LiveId" clId="{FE08A991-EB5C-498E-983D-97A2BE0F5BFB}" dt="2018-10-04T00:10:21.628" v="7051"/>
@@ -315,22 +282,6 @@
           <pc:docMk/>
           <pc:sldMk cId="0" sldId="273"/>
         </pc:sldMkLst>
-        <pc:spChg chg="mod">
-          <ac:chgData name="Xin Zou" userId="260b9726081dae15" providerId="LiveId" clId="{FE08A991-EB5C-498E-983D-97A2BE0F5BFB}" dt="2018-10-03T05:08:57.711" v="2837" actId="6549"/>
-          <ac:spMkLst>
-            <pc:docMk/>
-            <pc:sldMk cId="0" sldId="273"/>
-            <ac:spMk id="2" creationId="{00000000-0000-0000-0000-000000000000}"/>
-          </ac:spMkLst>
-        </pc:spChg>
-        <pc:spChg chg="mod">
-          <ac:chgData name="Xin Zou" userId="260b9726081dae15" providerId="LiveId" clId="{FE08A991-EB5C-498E-983D-97A2BE0F5BFB}" dt="2018-10-03T05:03:43.005" v="1995" actId="113"/>
-          <ac:spMkLst>
-            <pc:docMk/>
-            <pc:sldMk cId="0" sldId="273"/>
-            <ac:spMk id="3" creationId="{00000000-0000-0000-0000-000000000000}"/>
-          </ac:spMkLst>
-        </pc:spChg>
       </pc:sldChg>
       <pc:sldChg chg="modSp">
         <pc:chgData name="Xin Zou" userId="260b9726081dae15" providerId="LiveId" clId="{FE08A991-EB5C-498E-983D-97A2BE0F5BFB}" dt="2018-10-03T05:12:08.246" v="3018" actId="14"/>
@@ -338,22 +289,6 @@
           <pc:docMk/>
           <pc:sldMk cId="0" sldId="274"/>
         </pc:sldMkLst>
-        <pc:spChg chg="mod">
-          <ac:chgData name="Xin Zou" userId="260b9726081dae15" providerId="LiveId" clId="{FE08A991-EB5C-498E-983D-97A2BE0F5BFB}" dt="2018-10-03T05:12:08.246" v="3018" actId="14"/>
-          <ac:spMkLst>
-            <pc:docMk/>
-            <pc:sldMk cId="0" sldId="274"/>
-            <ac:spMk id="2" creationId="{00000000-0000-0000-0000-000000000000}"/>
-          </ac:spMkLst>
-        </pc:spChg>
-        <pc:spChg chg="mod">
-          <ac:chgData name="Xin Zou" userId="260b9726081dae15" providerId="LiveId" clId="{FE08A991-EB5C-498E-983D-97A2BE0F5BFB}" dt="2018-10-03T05:10:49.611" v="2854" actId="113"/>
-          <ac:spMkLst>
-            <pc:docMk/>
-            <pc:sldMk cId="0" sldId="274"/>
-            <ac:spMk id="3" creationId="{00000000-0000-0000-0000-000000000000}"/>
-          </ac:spMkLst>
-        </pc:spChg>
       </pc:sldChg>
       <pc:sldChg chg="modSp modAnim">
         <pc:chgData name="Xin Zou" userId="260b9726081dae15" providerId="LiveId" clId="{FE08A991-EB5C-498E-983D-97A2BE0F5BFB}" dt="2018-10-04T00:10:21.628" v="7051"/>
@@ -361,30 +296,6 @@
           <pc:docMk/>
           <pc:sldMk cId="0" sldId="275"/>
         </pc:sldMkLst>
-        <pc:spChg chg="mod">
-          <ac:chgData name="Xin Zou" userId="260b9726081dae15" providerId="LiveId" clId="{FE08A991-EB5C-498E-983D-97A2BE0F5BFB}" dt="2018-10-03T06:26:23.329" v="5387" actId="404"/>
-          <ac:spMkLst>
-            <pc:docMk/>
-            <pc:sldMk cId="0" sldId="275"/>
-            <ac:spMk id="2" creationId="{00000000-0000-0000-0000-000000000000}"/>
-          </ac:spMkLst>
-        </pc:spChg>
-        <pc:spChg chg="mod">
-          <ac:chgData name="Xin Zou" userId="260b9726081dae15" providerId="LiveId" clId="{FE08A991-EB5C-498E-983D-97A2BE0F5BFB}" dt="2018-10-03T06:05:29.395" v="5034" actId="113"/>
-          <ac:spMkLst>
-            <pc:docMk/>
-            <pc:sldMk cId="0" sldId="275"/>
-            <ac:spMk id="3" creationId="{00000000-0000-0000-0000-000000000000}"/>
-          </ac:spMkLst>
-        </pc:spChg>
-        <pc:graphicFrameChg chg="mod">
-          <ac:chgData name="Xin Zou" userId="260b9726081dae15" providerId="LiveId" clId="{FE08A991-EB5C-498E-983D-97A2BE0F5BFB}" dt="2018-10-04T00:10:21.628" v="7051"/>
-          <ac:graphicFrameMkLst>
-            <pc:docMk/>
-            <pc:sldMk cId="0" sldId="275"/>
-            <ac:graphicFrameMk id="4" creationId="{00000000-0000-0000-0000-000000000000}"/>
-          </ac:graphicFrameMkLst>
-        </pc:graphicFrameChg>
       </pc:sldChg>
       <pc:sldChg chg="modSp modAnim">
         <pc:chgData name="Xin Zou" userId="260b9726081dae15" providerId="LiveId" clId="{FE08A991-EB5C-498E-983D-97A2BE0F5BFB}" dt="2018-10-04T00:10:21.628" v="7051"/>
@@ -392,38 +303,6 @@
           <pc:docMk/>
           <pc:sldMk cId="0" sldId="277"/>
         </pc:sldMkLst>
-        <pc:spChg chg="mod">
-          <ac:chgData name="Xin Zou" userId="260b9726081dae15" providerId="LiveId" clId="{FE08A991-EB5C-498E-983D-97A2BE0F5BFB}" dt="2018-10-03T04:39:00.682" v="402"/>
-          <ac:spMkLst>
-            <pc:docMk/>
-            <pc:sldMk cId="0" sldId="277"/>
-            <ac:spMk id="3" creationId="{00000000-0000-0000-0000-000000000000}"/>
-          </ac:spMkLst>
-        </pc:spChg>
-        <pc:spChg chg="mod">
-          <ac:chgData name="Xin Zou" userId="260b9726081dae15" providerId="LiveId" clId="{FE08A991-EB5C-498E-983D-97A2BE0F5BFB}" dt="2018-10-03T05:04:24.729" v="2001" actId="113"/>
-          <ac:spMkLst>
-            <pc:docMk/>
-            <pc:sldMk cId="0" sldId="277"/>
-            <ac:spMk id="11266" creationId="{00000000-0000-0000-0000-000000000000}"/>
-          </ac:spMkLst>
-        </pc:spChg>
-        <pc:picChg chg="mod">
-          <ac:chgData name="Xin Zou" userId="260b9726081dae15" providerId="LiveId" clId="{FE08A991-EB5C-498E-983D-97A2BE0F5BFB}" dt="2018-10-04T00:10:21.628" v="7051"/>
-          <ac:picMkLst>
-            <pc:docMk/>
-            <pc:sldMk cId="0" sldId="277"/>
-            <ac:picMk id="1026" creationId="{00000000-0000-0000-0000-000000000000}"/>
-          </ac:picMkLst>
-        </pc:picChg>
-        <pc:picChg chg="mod">
-          <ac:chgData name="Xin Zou" userId="260b9726081dae15" providerId="LiveId" clId="{FE08A991-EB5C-498E-983D-97A2BE0F5BFB}" dt="2018-10-04T00:10:21.628" v="7051"/>
-          <ac:picMkLst>
-            <pc:docMk/>
-            <pc:sldMk cId="0" sldId="277"/>
-            <ac:picMk id="1027" creationId="{00000000-0000-0000-0000-000000000000}"/>
-          </ac:picMkLst>
-        </pc:picChg>
       </pc:sldChg>
       <pc:sldChg chg="modSp modAnim">
         <pc:chgData name="Xin Zou" userId="260b9726081dae15" providerId="LiveId" clId="{FE08A991-EB5C-498E-983D-97A2BE0F5BFB}" dt="2018-10-08T05:43:24.126" v="9113" actId="27636"/>
@@ -431,38 +310,6 @@
           <pc:docMk/>
           <pc:sldMk cId="0" sldId="278"/>
         </pc:sldMkLst>
-        <pc:spChg chg="mod">
-          <ac:chgData name="Xin Zou" userId="260b9726081dae15" providerId="LiveId" clId="{FE08A991-EB5C-498E-983D-97A2BE0F5BFB}" dt="2018-10-03T05:04:18.551" v="2000" actId="113"/>
-          <ac:spMkLst>
-            <pc:docMk/>
-            <pc:sldMk cId="0" sldId="278"/>
-            <ac:spMk id="2" creationId="{00000000-0000-0000-0000-000000000000}"/>
-          </ac:spMkLst>
-        </pc:spChg>
-        <pc:spChg chg="mod">
-          <ac:chgData name="Xin Zou" userId="260b9726081dae15" providerId="LiveId" clId="{FE08A991-EB5C-498E-983D-97A2BE0F5BFB}" dt="2018-10-08T05:43:24.126" v="9113" actId="27636"/>
-          <ac:spMkLst>
-            <pc:docMk/>
-            <pc:sldMk cId="0" sldId="278"/>
-            <ac:spMk id="3" creationId="{00000000-0000-0000-0000-000000000000}"/>
-          </ac:spMkLst>
-        </pc:spChg>
-        <pc:picChg chg="mod">
-          <ac:chgData name="Xin Zou" userId="260b9726081dae15" providerId="LiveId" clId="{FE08A991-EB5C-498E-983D-97A2BE0F5BFB}" dt="2018-10-04T00:10:21.628" v="7051"/>
-          <ac:picMkLst>
-            <pc:docMk/>
-            <pc:sldMk cId="0" sldId="278"/>
-            <ac:picMk id="1031" creationId="{00000000-0000-0000-0000-000000000000}"/>
-          </ac:picMkLst>
-        </pc:picChg>
-        <pc:picChg chg="mod">
-          <ac:chgData name="Xin Zou" userId="260b9726081dae15" providerId="LiveId" clId="{FE08A991-EB5C-498E-983D-97A2BE0F5BFB}" dt="2018-10-04T00:10:21.628" v="7051"/>
-          <ac:picMkLst>
-            <pc:docMk/>
-            <pc:sldMk cId="0" sldId="278"/>
-            <ac:picMk id="1034" creationId="{00000000-0000-0000-0000-000000000000}"/>
-          </ac:picMkLst>
-        </pc:picChg>
       </pc:sldChg>
       <pc:sldChg chg="modSp">
         <pc:chgData name="Xin Zou" userId="260b9726081dae15" providerId="LiveId" clId="{FE08A991-EB5C-498E-983D-97A2BE0F5BFB}" dt="2018-10-03T05:20:44.858" v="4966" actId="6549"/>
@@ -470,14 +317,6 @@
           <pc:docMk/>
           <pc:sldMk cId="0" sldId="279"/>
         </pc:sldMkLst>
-        <pc:spChg chg="mod">
-          <ac:chgData name="Xin Zou" userId="260b9726081dae15" providerId="LiveId" clId="{FE08A991-EB5C-498E-983D-97A2BE0F5BFB}" dt="2018-10-03T05:20:44.858" v="4966" actId="6549"/>
-          <ac:spMkLst>
-            <pc:docMk/>
-            <pc:sldMk cId="0" sldId="279"/>
-            <ac:spMk id="2" creationId="{00000000-0000-0000-0000-000000000000}"/>
-          </ac:spMkLst>
-        </pc:spChg>
       </pc:sldChg>
       <pc:sldChg chg="modSp">
         <pc:chgData name="Xin Zou" userId="260b9726081dae15" providerId="LiveId" clId="{FE08A991-EB5C-498E-983D-97A2BE0F5BFB}" dt="2018-10-08T05:43:24.244" v="9114" actId="27636"/>
@@ -485,30 +324,6 @@
           <pc:docMk/>
           <pc:sldMk cId="0" sldId="281"/>
         </pc:sldMkLst>
-        <pc:spChg chg="mod">
-          <ac:chgData name="Xin Zou" userId="260b9726081dae15" providerId="LiveId" clId="{FE08A991-EB5C-498E-983D-97A2BE0F5BFB}" dt="2018-10-08T05:43:24.244" v="9114" actId="27636"/>
-          <ac:spMkLst>
-            <pc:docMk/>
-            <pc:sldMk cId="0" sldId="281"/>
-            <ac:spMk id="3" creationId="{00000000-0000-0000-0000-000000000000}"/>
-          </ac:spMkLst>
-        </pc:spChg>
-        <pc:spChg chg="mod">
-          <ac:chgData name="Xin Zou" userId="260b9726081dae15" providerId="LiveId" clId="{FE08A991-EB5C-498E-983D-97A2BE0F5BFB}" dt="2018-10-04T00:10:21.628" v="7051"/>
-          <ac:spMkLst>
-            <pc:docMk/>
-            <pc:sldMk cId="0" sldId="281"/>
-            <ac:spMk id="4" creationId="{00000000-0000-0000-0000-000000000000}"/>
-          </ac:spMkLst>
-        </pc:spChg>
-        <pc:spChg chg="mod">
-          <ac:chgData name="Xin Zou" userId="260b9726081dae15" providerId="LiveId" clId="{FE08A991-EB5C-498E-983D-97A2BE0F5BFB}" dt="2018-10-04T00:10:21.628" v="7051"/>
-          <ac:spMkLst>
-            <pc:docMk/>
-            <pc:sldMk cId="0" sldId="281"/>
-            <ac:spMk id="5" creationId="{00000000-0000-0000-0000-000000000000}"/>
-          </ac:spMkLst>
-        </pc:spChg>
       </pc:sldChg>
       <pc:sldChg chg="modSp">
         <pc:chgData name="Xin Zou" userId="260b9726081dae15" providerId="LiveId" clId="{FE08A991-EB5C-498E-983D-97A2BE0F5BFB}" dt="2018-10-03T23:21:33.392" v="5617"/>
@@ -516,22 +331,6 @@
           <pc:docMk/>
           <pc:sldMk cId="0" sldId="282"/>
         </pc:sldMkLst>
-        <pc:spChg chg="mod">
-          <ac:chgData name="Xin Zou" userId="260b9726081dae15" providerId="LiveId" clId="{FE08A991-EB5C-498E-983D-97A2BE0F5BFB}" dt="2018-10-03T23:21:16.211" v="5500" actId="27636"/>
-          <ac:spMkLst>
-            <pc:docMk/>
-            <pc:sldMk cId="0" sldId="282"/>
-            <ac:spMk id="2" creationId="{00000000-0000-0000-0000-000000000000}"/>
-          </ac:spMkLst>
-        </pc:spChg>
-        <pc:spChg chg="mod">
-          <ac:chgData name="Xin Zou" userId="260b9726081dae15" providerId="LiveId" clId="{FE08A991-EB5C-498E-983D-97A2BE0F5BFB}" dt="2018-10-03T23:21:33.392" v="5617"/>
-          <ac:spMkLst>
-            <pc:docMk/>
-            <pc:sldMk cId="0" sldId="282"/>
-            <ac:spMk id="3" creationId="{00000000-0000-0000-0000-000000000000}"/>
-          </ac:spMkLst>
-        </pc:spChg>
       </pc:sldChg>
       <pc:sldChg chg="modSp del">
         <pc:chgData name="Xin Zou" userId="260b9726081dae15" providerId="LiveId" clId="{FE08A991-EB5C-498E-983D-97A2BE0F5BFB}" dt="2018-10-08T05:43:24.496" v="9122" actId="27636"/>
@@ -539,14 +338,6 @@
           <pc:docMk/>
           <pc:sldMk cId="3555601642" sldId="283"/>
         </pc:sldMkLst>
-        <pc:spChg chg="mod">
-          <ac:chgData name="Xin Zou" userId="260b9726081dae15" providerId="LiveId" clId="{FE08A991-EB5C-498E-983D-97A2BE0F5BFB}" dt="2018-10-08T05:43:24.496" v="9122" actId="27636"/>
-          <ac:spMkLst>
-            <pc:docMk/>
-            <pc:sldMk cId="3555601642" sldId="283"/>
-            <ac:spMk id="3" creationId="{00000000-0000-0000-0000-000000000000}"/>
-          </ac:spMkLst>
-        </pc:spChg>
       </pc:sldChg>
       <pc:sldChg chg="modSp">
         <pc:chgData name="Xin Zou" userId="260b9726081dae15" providerId="LiveId" clId="{FE08A991-EB5C-498E-983D-97A2BE0F5BFB}" dt="2018-10-04T00:10:21.628" v="7051"/>
@@ -554,46 +345,6 @@
           <pc:docMk/>
           <pc:sldMk cId="3264438971" sldId="286"/>
         </pc:sldMkLst>
-        <pc:spChg chg="mod">
-          <ac:chgData name="Xin Zou" userId="260b9726081dae15" providerId="LiveId" clId="{FE08A991-EB5C-498E-983D-97A2BE0F5BFB}" dt="2018-10-03T05:03:48.504" v="1996" actId="113"/>
-          <ac:spMkLst>
-            <pc:docMk/>
-            <pc:sldMk cId="3264438971" sldId="286"/>
-            <ac:spMk id="2" creationId="{00000000-0000-0000-0000-000000000000}"/>
-          </ac:spMkLst>
-        </pc:spChg>
-        <pc:spChg chg="mod">
-          <ac:chgData name="Xin Zou" userId="260b9726081dae15" providerId="LiveId" clId="{FE08A991-EB5C-498E-983D-97A2BE0F5BFB}" dt="2018-10-04T00:10:21.628" v="7051"/>
-          <ac:spMkLst>
-            <pc:docMk/>
-            <pc:sldMk cId="3264438971" sldId="286"/>
-            <ac:spMk id="3" creationId="{00000000-0000-0000-0000-000000000000}"/>
-          </ac:spMkLst>
-        </pc:spChg>
-        <pc:spChg chg="mod">
-          <ac:chgData name="Xin Zou" userId="260b9726081dae15" providerId="LiveId" clId="{FE08A991-EB5C-498E-983D-97A2BE0F5BFB}" dt="2018-10-04T00:10:21.628" v="7051"/>
-          <ac:spMkLst>
-            <pc:docMk/>
-            <pc:sldMk cId="3264438971" sldId="286"/>
-            <ac:spMk id="4" creationId="{00000000-0000-0000-0000-000000000000}"/>
-          </ac:spMkLst>
-        </pc:spChg>
-        <pc:spChg chg="mod">
-          <ac:chgData name="Xin Zou" userId="260b9726081dae15" providerId="LiveId" clId="{FE08A991-EB5C-498E-983D-97A2BE0F5BFB}" dt="2018-10-04T00:10:21.628" v="7051"/>
-          <ac:spMkLst>
-            <pc:docMk/>
-            <pc:sldMk cId="3264438971" sldId="286"/>
-            <ac:spMk id="5" creationId="{00000000-0000-0000-0000-000000000000}"/>
-          </ac:spMkLst>
-        </pc:spChg>
-        <pc:spChg chg="mod">
-          <ac:chgData name="Xin Zou" userId="260b9726081dae15" providerId="LiveId" clId="{FE08A991-EB5C-498E-983D-97A2BE0F5BFB}" dt="2018-10-04T00:10:21.628" v="7051"/>
-          <ac:spMkLst>
-            <pc:docMk/>
-            <pc:sldMk cId="3264438971" sldId="286"/>
-            <ac:spMk id="6" creationId="{00000000-0000-0000-0000-000000000000}"/>
-          </ac:spMkLst>
-        </pc:spChg>
       </pc:sldChg>
       <pc:sldChg chg="modSp">
         <pc:chgData name="Xin Zou" userId="260b9726081dae15" providerId="LiveId" clId="{FE08A991-EB5C-498E-983D-97A2BE0F5BFB}" dt="2018-10-04T00:10:21.628" v="7051"/>
@@ -601,38 +352,6 @@
           <pc:docMk/>
           <pc:sldMk cId="601280872" sldId="287"/>
         </pc:sldMkLst>
-        <pc:spChg chg="mod">
-          <ac:chgData name="Xin Zou" userId="260b9726081dae15" providerId="LiveId" clId="{FE08A991-EB5C-498E-983D-97A2BE0F5BFB}" dt="2018-10-04T00:10:21.628" v="7051"/>
-          <ac:spMkLst>
-            <pc:docMk/>
-            <pc:sldMk cId="601280872" sldId="287"/>
-            <ac:spMk id="5" creationId="{00000000-0000-0000-0000-000000000000}"/>
-          </ac:spMkLst>
-        </pc:spChg>
-        <pc:spChg chg="mod">
-          <ac:chgData name="Xin Zou" userId="260b9726081dae15" providerId="LiveId" clId="{FE08A991-EB5C-498E-983D-97A2BE0F5BFB}" dt="2018-10-04T00:10:21.628" v="7051"/>
-          <ac:spMkLst>
-            <pc:docMk/>
-            <pc:sldMk cId="601280872" sldId="287"/>
-            <ac:spMk id="8" creationId="{00000000-0000-0000-0000-000000000000}"/>
-          </ac:spMkLst>
-        </pc:spChg>
-        <pc:spChg chg="mod">
-          <ac:chgData name="Xin Zou" userId="260b9726081dae15" providerId="LiveId" clId="{FE08A991-EB5C-498E-983D-97A2BE0F5BFB}" dt="2018-10-04T00:10:21.628" v="7051"/>
-          <ac:spMkLst>
-            <pc:docMk/>
-            <pc:sldMk cId="601280872" sldId="287"/>
-            <ac:spMk id="10" creationId="{00000000-0000-0000-0000-000000000000}"/>
-          </ac:spMkLst>
-        </pc:spChg>
-        <pc:spChg chg="mod">
-          <ac:chgData name="Xin Zou" userId="260b9726081dae15" providerId="LiveId" clId="{FE08A991-EB5C-498E-983D-97A2BE0F5BFB}" dt="2018-10-04T00:10:21.628" v="7051"/>
-          <ac:spMkLst>
-            <pc:docMk/>
-            <pc:sldMk cId="601280872" sldId="287"/>
-            <ac:spMk id="11" creationId="{00000000-0000-0000-0000-000000000000}"/>
-          </ac:spMkLst>
-        </pc:spChg>
       </pc:sldChg>
       <pc:sldChg chg="modSp">
         <pc:chgData name="Xin Zou" userId="260b9726081dae15" providerId="LiveId" clId="{FE08A991-EB5C-498E-983D-97A2BE0F5BFB}" dt="2018-10-03T05:04:06.331" v="1998" actId="113"/>
@@ -640,22 +359,6 @@
           <pc:docMk/>
           <pc:sldMk cId="2010243271" sldId="288"/>
         </pc:sldMkLst>
-        <pc:spChg chg="mod">
-          <ac:chgData name="Xin Zou" userId="260b9726081dae15" providerId="LiveId" clId="{FE08A991-EB5C-498E-983D-97A2BE0F5BFB}" dt="2018-10-03T05:04:06.331" v="1998" actId="113"/>
-          <ac:spMkLst>
-            <pc:docMk/>
-            <pc:sldMk cId="2010243271" sldId="288"/>
-            <ac:spMk id="2" creationId="{00000000-0000-0000-0000-000000000000}"/>
-          </ac:spMkLst>
-        </pc:spChg>
-        <pc:spChg chg="mod">
-          <ac:chgData name="Xin Zou" userId="260b9726081dae15" providerId="LiveId" clId="{FE08A991-EB5C-498E-983D-97A2BE0F5BFB}" dt="2018-10-03T04:46:46.787" v="1854"/>
-          <ac:spMkLst>
-            <pc:docMk/>
-            <pc:sldMk cId="2010243271" sldId="288"/>
-            <ac:spMk id="3" creationId="{00000000-0000-0000-0000-000000000000}"/>
-          </ac:spMkLst>
-        </pc:spChg>
       </pc:sldChg>
       <pc:sldChg chg="modSp add">
         <pc:chgData name="Xin Zou" userId="260b9726081dae15" providerId="LiveId" clId="{FE08A991-EB5C-498E-983D-97A2BE0F5BFB}" dt="2018-10-08T05:43:24.471" v="9121" actId="27636"/>
@@ -663,14 +366,6 @@
           <pc:docMk/>
           <pc:sldMk cId="3413591577" sldId="290"/>
         </pc:sldMkLst>
-        <pc:spChg chg="mod">
-          <ac:chgData name="Xin Zou" userId="260b9726081dae15" providerId="LiveId" clId="{FE08A991-EB5C-498E-983D-97A2BE0F5BFB}" dt="2018-10-08T05:43:24.471" v="9121" actId="27636"/>
-          <ac:spMkLst>
-            <pc:docMk/>
-            <pc:sldMk cId="3413591577" sldId="290"/>
-            <ac:spMk id="3" creationId="{00000000-0000-0000-0000-000000000000}"/>
-          </ac:spMkLst>
-        </pc:spChg>
       </pc:sldChg>
       <pc:sldChg chg="del">
         <pc:chgData name="Xin Zou" userId="260b9726081dae15" providerId="LiveId" clId="{FE08A991-EB5C-498E-983D-97A2BE0F5BFB}" dt="2018-10-08T05:43:05.055" v="9110" actId="2696"/>
@@ -685,14 +380,6 @@
           <pc:docMk/>
           <pc:sldMk cId="45561062" sldId="294"/>
         </pc:sldMkLst>
-        <pc:spChg chg="mod">
-          <ac:chgData name="Xin Zou" userId="260b9726081dae15" providerId="LiveId" clId="{FE08A991-EB5C-498E-983D-97A2BE0F5BFB}" dt="2018-10-03T05:03:59.821" v="1997" actId="113"/>
-          <ac:spMkLst>
-            <pc:docMk/>
-            <pc:sldMk cId="45561062" sldId="294"/>
-            <ac:spMk id="2" creationId="{00000000-0000-0000-0000-000000000000}"/>
-          </ac:spMkLst>
-        </pc:spChg>
       </pc:sldChg>
       <pc:sldChg chg="modSp add">
         <pc:chgData name="Xin Zou" userId="260b9726081dae15" providerId="LiveId" clId="{FE08A991-EB5C-498E-983D-97A2BE0F5BFB}" dt="2018-10-04T05:07:56.041" v="9040" actId="1036"/>
@@ -700,14 +387,6 @@
           <pc:docMk/>
           <pc:sldMk cId="2788818676" sldId="295"/>
         </pc:sldMkLst>
-        <pc:picChg chg="mod">
-          <ac:chgData name="Xin Zou" userId="260b9726081dae15" providerId="LiveId" clId="{FE08A991-EB5C-498E-983D-97A2BE0F5BFB}" dt="2018-10-04T05:07:56.041" v="9040" actId="1036"/>
-          <ac:picMkLst>
-            <pc:docMk/>
-            <pc:sldMk cId="2788818676" sldId="295"/>
-            <ac:picMk id="4" creationId="{00000000-0000-0000-0000-000000000000}"/>
-          </ac:picMkLst>
-        </pc:picChg>
       </pc:sldChg>
       <pc:sldChg chg="add">
         <pc:chgData name="Xin Zou" userId="260b9726081dae15" providerId="LiveId" clId="{FE08A991-EB5C-498E-983D-97A2BE0F5BFB}" dt="2018-10-04T05:06:48.406" v="9035"/>
@@ -722,14 +401,6 @@
           <pc:docMk/>
           <pc:sldMk cId="2230343479" sldId="297"/>
         </pc:sldMkLst>
-        <pc:picChg chg="mod">
-          <ac:chgData name="Xin Zou" userId="260b9726081dae15" providerId="LiveId" clId="{FE08A991-EB5C-498E-983D-97A2BE0F5BFB}" dt="2018-10-04T00:10:21.628" v="7051"/>
-          <ac:picMkLst>
-            <pc:docMk/>
-            <pc:sldMk cId="2230343479" sldId="297"/>
-            <ac:picMk id="4" creationId="{00000000-0000-0000-0000-000000000000}"/>
-          </ac:picMkLst>
-        </pc:picChg>
       </pc:sldChg>
       <pc:sldChg chg="modSp">
         <pc:chgData name="Xin Zou" userId="260b9726081dae15" providerId="LiveId" clId="{FE08A991-EB5C-498E-983D-97A2BE0F5BFB}" dt="2018-10-04T00:10:21.628" v="7051"/>
@@ -737,14 +408,6 @@
           <pc:docMk/>
           <pc:sldMk cId="1640774756" sldId="298"/>
         </pc:sldMkLst>
-        <pc:picChg chg="mod">
-          <ac:chgData name="Xin Zou" userId="260b9726081dae15" providerId="LiveId" clId="{FE08A991-EB5C-498E-983D-97A2BE0F5BFB}" dt="2018-10-04T00:10:21.628" v="7051"/>
-          <ac:picMkLst>
-            <pc:docMk/>
-            <pc:sldMk cId="1640774756" sldId="298"/>
-            <ac:picMk id="4" creationId="{00000000-0000-0000-0000-000000000000}"/>
-          </ac:picMkLst>
-        </pc:picChg>
       </pc:sldChg>
       <pc:sldChg chg="modSp">
         <pc:chgData name="Xin Zou" userId="260b9726081dae15" providerId="LiveId" clId="{FE08A991-EB5C-498E-983D-97A2BE0F5BFB}" dt="2018-10-03T06:33:33.729" v="5388" actId="113"/>
@@ -752,14 +415,6 @@
           <pc:docMk/>
           <pc:sldMk cId="303877150" sldId="299"/>
         </pc:sldMkLst>
-        <pc:spChg chg="mod">
-          <ac:chgData name="Xin Zou" userId="260b9726081dae15" providerId="LiveId" clId="{FE08A991-EB5C-498E-983D-97A2BE0F5BFB}" dt="2018-10-03T06:33:33.729" v="5388" actId="113"/>
-          <ac:spMkLst>
-            <pc:docMk/>
-            <pc:sldMk cId="303877150" sldId="299"/>
-            <ac:spMk id="2" creationId="{00000000-0000-0000-0000-000000000000}"/>
-          </ac:spMkLst>
-        </pc:spChg>
       </pc:sldChg>
       <pc:sldChg chg="add">
         <pc:chgData name="Xin Zou" userId="260b9726081dae15" providerId="LiveId" clId="{FE08A991-EB5C-498E-983D-97A2BE0F5BFB}" dt="2018-10-04T05:06:48.406" v="9035"/>
@@ -774,30 +429,6 @@
           <pc:docMk/>
           <pc:sldMk cId="961310438" sldId="301"/>
         </pc:sldMkLst>
-        <pc:spChg chg="mod">
-          <ac:chgData name="Xin Zou" userId="260b9726081dae15" providerId="LiveId" clId="{FE08A991-EB5C-498E-983D-97A2BE0F5BFB}" dt="2018-10-03T23:25:39.270" v="5879"/>
-          <ac:spMkLst>
-            <pc:docMk/>
-            <pc:sldMk cId="961310438" sldId="301"/>
-            <ac:spMk id="2" creationId="{847B9925-DD12-440D-8933-ED9C696D74D2}"/>
-          </ac:spMkLst>
-        </pc:spChg>
-        <pc:spChg chg="del">
-          <ac:chgData name="Xin Zou" userId="260b9726081dae15" providerId="LiveId" clId="{FE08A991-EB5C-498E-983D-97A2BE0F5BFB}" dt="2018-10-03T23:26:53.311" v="5880"/>
-          <ac:spMkLst>
-            <pc:docMk/>
-            <pc:sldMk cId="961310438" sldId="301"/>
-            <ac:spMk id="3" creationId="{75DADEA8-AE2C-4D6A-A4DF-6A315DF3BFB5}"/>
-          </ac:spMkLst>
-        </pc:spChg>
-        <pc:picChg chg="add mod">
-          <ac:chgData name="Xin Zou" userId="260b9726081dae15" providerId="LiveId" clId="{FE08A991-EB5C-498E-983D-97A2BE0F5BFB}" dt="2018-10-04T00:10:21.628" v="7051"/>
-          <ac:picMkLst>
-            <pc:docMk/>
-            <pc:sldMk cId="961310438" sldId="301"/>
-            <ac:picMk id="4" creationId="{A6753D51-0347-49BA-B950-1932ED6F1AAF}"/>
-          </ac:picMkLst>
-        </pc:picChg>
       </pc:sldChg>
       <pc:sldChg chg="modSp add">
         <pc:chgData name="Xin Zou" userId="260b9726081dae15" providerId="LiveId" clId="{FE08A991-EB5C-498E-983D-97A2BE0F5BFB}" dt="2018-10-04T00:10:22.450" v="7055" actId="27636"/>
@@ -805,22 +436,6 @@
           <pc:docMk/>
           <pc:sldMk cId="3142170630" sldId="302"/>
         </pc:sldMkLst>
-        <pc:spChg chg="mod">
-          <ac:chgData name="Xin Zou" userId="260b9726081dae15" providerId="LiveId" clId="{FE08A991-EB5C-498E-983D-97A2BE0F5BFB}" dt="2018-10-03T23:27:48.825" v="5906"/>
-          <ac:spMkLst>
-            <pc:docMk/>
-            <pc:sldMk cId="3142170630" sldId="302"/>
-            <ac:spMk id="2" creationId="{341A175D-6F43-4530-B64F-FCADB81EBA81}"/>
-          </ac:spMkLst>
-        </pc:spChg>
-        <pc:spChg chg="mod">
-          <ac:chgData name="Xin Zou" userId="260b9726081dae15" providerId="LiveId" clId="{FE08A991-EB5C-498E-983D-97A2BE0F5BFB}" dt="2018-10-04T00:10:22.450" v="7055" actId="27636"/>
-          <ac:spMkLst>
-            <pc:docMk/>
-            <pc:sldMk cId="3142170630" sldId="302"/>
-            <ac:spMk id="3" creationId="{63E977AD-DCFC-4342-A6FD-6185369E1083}"/>
-          </ac:spMkLst>
-        </pc:spChg>
       </pc:sldChg>
       <pc:sldChg chg="modSp add">
         <pc:chgData name="Xin Zou" userId="260b9726081dae15" providerId="LiveId" clId="{FE08A991-EB5C-498E-983D-97A2BE0F5BFB}" dt="2018-10-04T00:10:22.519" v="7057" actId="27636"/>
@@ -828,22 +443,6 @@
           <pc:docMk/>
           <pc:sldMk cId="37366169" sldId="303"/>
         </pc:sldMkLst>
-        <pc:spChg chg="mod">
-          <ac:chgData name="Xin Zou" userId="260b9726081dae15" providerId="LiveId" clId="{FE08A991-EB5C-498E-983D-97A2BE0F5BFB}" dt="2018-10-04T00:10:22.503" v="7056" actId="27636"/>
-          <ac:spMkLst>
-            <pc:docMk/>
-            <pc:sldMk cId="37366169" sldId="303"/>
-            <ac:spMk id="2" creationId="{D79D026B-2EFE-4060-882A-AE65C0C4D00B}"/>
-          </ac:spMkLst>
-        </pc:spChg>
-        <pc:spChg chg="mod">
-          <ac:chgData name="Xin Zou" userId="260b9726081dae15" providerId="LiveId" clId="{FE08A991-EB5C-498E-983D-97A2BE0F5BFB}" dt="2018-10-04T00:10:22.519" v="7057" actId="27636"/>
-          <ac:spMkLst>
-            <pc:docMk/>
-            <pc:sldMk cId="37366169" sldId="303"/>
-            <ac:spMk id="3" creationId="{82935234-AFFA-4D32-9A17-3F2F59285C68}"/>
-          </ac:spMkLst>
-        </pc:spChg>
       </pc:sldChg>
       <pc:sldChg chg="modSp add">
         <pc:chgData name="Xin Zou" userId="260b9726081dae15" providerId="LiveId" clId="{FE08A991-EB5C-498E-983D-97A2BE0F5BFB}" dt="2018-10-04T00:10:22.633" v="7058" actId="27636"/>
@@ -851,22 +450,6 @@
           <pc:docMk/>
           <pc:sldMk cId="1469810937" sldId="304"/>
         </pc:sldMkLst>
-        <pc:spChg chg="mod">
-          <ac:chgData name="Xin Zou" userId="260b9726081dae15" providerId="LiveId" clId="{FE08A991-EB5C-498E-983D-97A2BE0F5BFB}" dt="2018-10-03T23:31:58.506" v="6078" actId="27636"/>
-          <ac:spMkLst>
-            <pc:docMk/>
-            <pc:sldMk cId="1469810937" sldId="304"/>
-            <ac:spMk id="2" creationId="{59685598-4CD3-4C35-8C3F-AAC62F930BFB}"/>
-          </ac:spMkLst>
-        </pc:spChg>
-        <pc:spChg chg="mod">
-          <ac:chgData name="Xin Zou" userId="260b9726081dae15" providerId="LiveId" clId="{FE08A991-EB5C-498E-983D-97A2BE0F5BFB}" dt="2018-10-04T00:10:22.633" v="7058" actId="27636"/>
-          <ac:spMkLst>
-            <pc:docMk/>
-            <pc:sldMk cId="1469810937" sldId="304"/>
-            <ac:spMk id="3" creationId="{9F449120-2354-4B84-892E-F00A42C74A5D}"/>
-          </ac:spMkLst>
-        </pc:spChg>
       </pc:sldChg>
       <pc:sldChg chg="addSp modSp add">
         <pc:chgData name="Xin Zou" userId="260b9726081dae15" providerId="LiveId" clId="{FE08A991-EB5C-498E-983D-97A2BE0F5BFB}" dt="2018-10-08T05:43:24.312" v="9115" actId="27636"/>
@@ -874,30 +457,6 @@
           <pc:docMk/>
           <pc:sldMk cId="3059523748" sldId="305"/>
         </pc:sldMkLst>
-        <pc:spChg chg="mod">
-          <ac:chgData name="Xin Zou" userId="260b9726081dae15" providerId="LiveId" clId="{FE08A991-EB5C-498E-983D-97A2BE0F5BFB}" dt="2018-10-03T23:32:50.787" v="6157"/>
-          <ac:spMkLst>
-            <pc:docMk/>
-            <pc:sldMk cId="3059523748" sldId="305"/>
-            <ac:spMk id="2" creationId="{92364B9B-A74F-4934-81F4-ACDA5F2EEB9D}"/>
-          </ac:spMkLst>
-        </pc:spChg>
-        <pc:spChg chg="mod">
-          <ac:chgData name="Xin Zou" userId="260b9726081dae15" providerId="LiveId" clId="{FE08A991-EB5C-498E-983D-97A2BE0F5BFB}" dt="2018-10-08T05:43:24.312" v="9115" actId="27636"/>
-          <ac:spMkLst>
-            <pc:docMk/>
-            <pc:sldMk cId="3059523748" sldId="305"/>
-            <ac:spMk id="3" creationId="{62EB2482-9CFE-4BA5-87D1-6F24EB602CB8}"/>
-          </ac:spMkLst>
-        </pc:spChg>
-        <pc:picChg chg="add mod">
-          <ac:chgData name="Xin Zou" userId="260b9726081dae15" providerId="LiveId" clId="{FE08A991-EB5C-498E-983D-97A2BE0F5BFB}" dt="2018-10-04T00:10:21.628" v="7051"/>
-          <ac:picMkLst>
-            <pc:docMk/>
-            <pc:sldMk cId="3059523748" sldId="305"/>
-            <ac:picMk id="1026" creationId="{1380D148-CC6F-40C1-8380-92D9216CF3C3}"/>
-          </ac:picMkLst>
-        </pc:picChg>
       </pc:sldChg>
       <pc:sldChg chg="addSp modSp add">
         <pc:chgData name="Xin Zou" userId="260b9726081dae15" providerId="LiveId" clId="{FE08A991-EB5C-498E-983D-97A2BE0F5BFB}" dt="2018-10-08T05:43:24.352" v="9116" actId="27636"/>
@@ -905,30 +464,6 @@
           <pc:docMk/>
           <pc:sldMk cId="1735068261" sldId="306"/>
         </pc:sldMkLst>
-        <pc:spChg chg="mod">
-          <ac:chgData name="Xin Zou" userId="260b9726081dae15" providerId="LiveId" clId="{FE08A991-EB5C-498E-983D-97A2BE0F5BFB}" dt="2018-10-03T23:38:43.998" v="6462"/>
-          <ac:spMkLst>
-            <pc:docMk/>
-            <pc:sldMk cId="1735068261" sldId="306"/>
-            <ac:spMk id="2" creationId="{7F0D5F66-C581-4BB1-9C74-6D06BDFA7204}"/>
-          </ac:spMkLst>
-        </pc:spChg>
-        <pc:spChg chg="mod">
-          <ac:chgData name="Xin Zou" userId="260b9726081dae15" providerId="LiveId" clId="{FE08A991-EB5C-498E-983D-97A2BE0F5BFB}" dt="2018-10-08T05:43:24.352" v="9116" actId="27636"/>
-          <ac:spMkLst>
-            <pc:docMk/>
-            <pc:sldMk cId="1735068261" sldId="306"/>
-            <ac:spMk id="3" creationId="{891A0752-746C-4640-BAB7-6364138D2C96}"/>
-          </ac:spMkLst>
-        </pc:spChg>
-        <pc:picChg chg="add mod">
-          <ac:chgData name="Xin Zou" userId="260b9726081dae15" providerId="LiveId" clId="{FE08A991-EB5C-498E-983D-97A2BE0F5BFB}" dt="2018-10-04T00:10:21.628" v="7051"/>
-          <ac:picMkLst>
-            <pc:docMk/>
-            <pc:sldMk cId="1735068261" sldId="306"/>
-            <ac:picMk id="4" creationId="{75463CFF-537B-43C4-9208-178321B74503}"/>
-          </ac:picMkLst>
-        </pc:picChg>
       </pc:sldChg>
       <pc:sldChg chg="modSp add">
         <pc:chgData name="Xin Zou" userId="260b9726081dae15" providerId="LiveId" clId="{FE08A991-EB5C-498E-983D-97A2BE0F5BFB}" dt="2018-10-03T23:37:59.534" v="6436" actId="20577"/>
@@ -936,22 +471,6 @@
           <pc:docMk/>
           <pc:sldMk cId="224053405" sldId="307"/>
         </pc:sldMkLst>
-        <pc:spChg chg="mod">
-          <ac:chgData name="Xin Zou" userId="260b9726081dae15" providerId="LiveId" clId="{FE08A991-EB5C-498E-983D-97A2BE0F5BFB}" dt="2018-10-03T23:37:04.641" v="6271"/>
-          <ac:spMkLst>
-            <pc:docMk/>
-            <pc:sldMk cId="224053405" sldId="307"/>
-            <ac:spMk id="2" creationId="{5CE18483-0F71-4391-B196-18C3E1BE3B0B}"/>
-          </ac:spMkLst>
-        </pc:spChg>
-        <pc:spChg chg="mod">
-          <ac:chgData name="Xin Zou" userId="260b9726081dae15" providerId="LiveId" clId="{FE08A991-EB5C-498E-983D-97A2BE0F5BFB}" dt="2018-10-03T23:37:59.534" v="6436" actId="20577"/>
-          <ac:spMkLst>
-            <pc:docMk/>
-            <pc:sldMk cId="224053405" sldId="307"/>
-            <ac:spMk id="3" creationId="{55E0976A-1108-44FE-B28E-89297F048DD1}"/>
-          </ac:spMkLst>
-        </pc:spChg>
       </pc:sldChg>
       <pc:sldChg chg="modSp add modAnim">
         <pc:chgData name="Xin Zou" userId="260b9726081dae15" providerId="LiveId" clId="{FE08A991-EB5C-498E-983D-97A2BE0F5BFB}" dt="2018-10-08T05:43:24.381" v="9117" actId="27636"/>
@@ -959,22 +478,6 @@
           <pc:docMk/>
           <pc:sldMk cId="1647869658" sldId="308"/>
         </pc:sldMkLst>
-        <pc:spChg chg="mod">
-          <ac:chgData name="Xin Zou" userId="260b9726081dae15" providerId="LiveId" clId="{FE08A991-EB5C-498E-983D-97A2BE0F5BFB}" dt="2018-10-04T00:10:22.756" v="7059" actId="27636"/>
-          <ac:spMkLst>
-            <pc:docMk/>
-            <pc:sldMk cId="1647869658" sldId="308"/>
-            <ac:spMk id="2" creationId="{D1B8A3F4-908E-47FE-8D82-8D7634E72B42}"/>
-          </ac:spMkLst>
-        </pc:spChg>
-        <pc:spChg chg="mod">
-          <ac:chgData name="Xin Zou" userId="260b9726081dae15" providerId="LiveId" clId="{FE08A991-EB5C-498E-983D-97A2BE0F5BFB}" dt="2018-10-08T05:43:24.381" v="9117" actId="27636"/>
-          <ac:spMkLst>
-            <pc:docMk/>
-            <pc:sldMk cId="1647869658" sldId="308"/>
-            <ac:spMk id="3" creationId="{3953811D-FB60-4427-9B84-943EB8BDA8CD}"/>
-          </ac:spMkLst>
-        </pc:spChg>
       </pc:sldChg>
       <pc:sldChg chg="addSp modSp add">
         <pc:chgData name="Xin Zou" userId="260b9726081dae15" providerId="LiveId" clId="{FE08A991-EB5C-498E-983D-97A2BE0F5BFB}" dt="2018-10-08T05:43:57.607" v="9125" actId="1076"/>
@@ -982,38 +485,6 @@
           <pc:docMk/>
           <pc:sldMk cId="3479106841" sldId="309"/>
         </pc:sldMkLst>
-        <pc:spChg chg="mod">
-          <ac:chgData name="Xin Zou" userId="260b9726081dae15" providerId="LiveId" clId="{FE08A991-EB5C-498E-983D-97A2BE0F5BFB}" dt="2018-10-04T00:06:47.447" v="7038" actId="5793"/>
-          <ac:spMkLst>
-            <pc:docMk/>
-            <pc:sldMk cId="3479106841" sldId="309"/>
-            <ac:spMk id="2" creationId="{FF4D2C3E-FCDF-4D04-9831-BB36DB39F392}"/>
-          </ac:spMkLst>
-        </pc:spChg>
-        <pc:spChg chg="mod">
-          <ac:chgData name="Xin Zou" userId="260b9726081dae15" providerId="LiveId" clId="{FE08A991-EB5C-498E-983D-97A2BE0F5BFB}" dt="2018-10-08T05:43:24.406" v="9118" actId="27636"/>
-          <ac:spMkLst>
-            <pc:docMk/>
-            <pc:sldMk cId="3479106841" sldId="309"/>
-            <ac:spMk id="3" creationId="{FCAC2359-F7D4-4211-ADAB-6DAE8ED42820}"/>
-          </ac:spMkLst>
-        </pc:spChg>
-        <pc:spChg chg="add mod">
-          <ac:chgData name="Xin Zou" userId="260b9726081dae15" providerId="LiveId" clId="{FE08A991-EB5C-498E-983D-97A2BE0F5BFB}" dt="2018-10-08T05:43:48.542" v="9124" actId="1076"/>
-          <ac:spMkLst>
-            <pc:docMk/>
-            <pc:sldMk cId="3479106841" sldId="309"/>
-            <ac:spMk id="4" creationId="{636875EA-935F-44BA-9DA1-6A1CC1CEC348}"/>
-          </ac:spMkLst>
-        </pc:spChg>
-        <pc:picChg chg="add mod">
-          <ac:chgData name="Xin Zou" userId="260b9726081dae15" providerId="LiveId" clId="{FE08A991-EB5C-498E-983D-97A2BE0F5BFB}" dt="2018-10-08T05:43:57.607" v="9125" actId="1076"/>
-          <ac:picMkLst>
-            <pc:docMk/>
-            <pc:sldMk cId="3479106841" sldId="309"/>
-            <ac:picMk id="2050" creationId="{1C7E2AEC-7B5D-4FFB-AA24-F6E1E43EFA36}"/>
-          </ac:picMkLst>
-        </pc:picChg>
       </pc:sldChg>
       <pc:sldChg chg="addSp modSp add">
         <pc:chgData name="Xin Zou" userId="260b9726081dae15" providerId="LiveId" clId="{FE08A991-EB5C-498E-983D-97A2BE0F5BFB}" dt="2018-10-04T00:19:43.506" v="7248" actId="6549"/>
@@ -1021,30 +492,6 @@
           <pc:docMk/>
           <pc:sldMk cId="2111016971" sldId="310"/>
         </pc:sldMkLst>
-        <pc:spChg chg="mod">
-          <ac:chgData name="Xin Zou" userId="260b9726081dae15" providerId="LiveId" clId="{FE08A991-EB5C-498E-983D-97A2BE0F5BFB}" dt="2018-10-04T00:12:27.954" v="7121" actId="20577"/>
-          <ac:spMkLst>
-            <pc:docMk/>
-            <pc:sldMk cId="2111016971" sldId="310"/>
-            <ac:spMk id="2" creationId="{CC713153-A66C-4BEE-AD57-324BE397291E}"/>
-          </ac:spMkLst>
-        </pc:spChg>
-        <pc:spChg chg="mod">
-          <ac:chgData name="Xin Zou" userId="260b9726081dae15" providerId="LiveId" clId="{FE08A991-EB5C-498E-983D-97A2BE0F5BFB}" dt="2018-10-04T00:19:43.506" v="7248" actId="6549"/>
-          <ac:spMkLst>
-            <pc:docMk/>
-            <pc:sldMk cId="2111016971" sldId="310"/>
-            <ac:spMk id="3" creationId="{C9F998A9-C3A7-466C-92A1-62E643270429}"/>
-          </ac:spMkLst>
-        </pc:spChg>
-        <pc:picChg chg="add mod">
-          <ac:chgData name="Xin Zou" userId="260b9726081dae15" providerId="LiveId" clId="{FE08A991-EB5C-498E-983D-97A2BE0F5BFB}" dt="2018-10-04T00:16:47.450" v="7201" actId="14100"/>
-          <ac:picMkLst>
-            <pc:docMk/>
-            <pc:sldMk cId="2111016971" sldId="310"/>
-            <ac:picMk id="4" creationId="{237F48E3-111F-434A-9FF4-74609C59D4BD}"/>
-          </ac:picMkLst>
-        </pc:picChg>
       </pc:sldChg>
       <pc:sldChg chg="modSp add">
         <pc:chgData name="Xin Zou" userId="260b9726081dae15" providerId="LiveId" clId="{FE08A991-EB5C-498E-983D-97A2BE0F5BFB}" dt="2018-10-08T05:43:24.430" v="9119" actId="27636"/>
@@ -1052,22 +499,6 @@
           <pc:docMk/>
           <pc:sldMk cId="2300063515" sldId="311"/>
         </pc:sldMkLst>
-        <pc:spChg chg="mod">
-          <ac:chgData name="Xin Zou" userId="260b9726081dae15" providerId="LiveId" clId="{FE08A991-EB5C-498E-983D-97A2BE0F5BFB}" dt="2018-10-04T04:17:19.388" v="7675" actId="5793"/>
-          <ac:spMkLst>
-            <pc:docMk/>
-            <pc:sldMk cId="2300063515" sldId="311"/>
-            <ac:spMk id="2" creationId="{B4B5EDE4-BB76-48B6-83A2-D7CA600CBC75}"/>
-          </ac:spMkLst>
-        </pc:spChg>
-        <pc:spChg chg="mod">
-          <ac:chgData name="Xin Zou" userId="260b9726081dae15" providerId="LiveId" clId="{FE08A991-EB5C-498E-983D-97A2BE0F5BFB}" dt="2018-10-08T05:43:24.430" v="9119" actId="27636"/>
-          <ac:spMkLst>
-            <pc:docMk/>
-            <pc:sldMk cId="2300063515" sldId="311"/>
-            <ac:spMk id="3" creationId="{8BBB6F6F-81CF-4431-AF56-035DB7A8F17C}"/>
-          </ac:spMkLst>
-        </pc:spChg>
       </pc:sldChg>
       <pc:sldChg chg="addSp delSp modSp add modAnim">
         <pc:chgData name="Xin Zou" userId="260b9726081dae15" providerId="LiveId" clId="{FE08A991-EB5C-498E-983D-97A2BE0F5BFB}" dt="2018-10-04T04:45:45.322" v="8301"/>
@@ -1075,54 +506,6 @@
           <pc:docMk/>
           <pc:sldMk cId="852070667" sldId="312"/>
         </pc:sldMkLst>
-        <pc:spChg chg="mod">
-          <ac:chgData name="Xin Zou" userId="260b9726081dae15" providerId="LiveId" clId="{FE08A991-EB5C-498E-983D-97A2BE0F5BFB}" dt="2018-10-04T04:23:04.301" v="7725"/>
-          <ac:spMkLst>
-            <pc:docMk/>
-            <pc:sldMk cId="852070667" sldId="312"/>
-            <ac:spMk id="2" creationId="{3CAD3260-D3B2-467A-9605-1567B03BC767}"/>
-          </ac:spMkLst>
-        </pc:spChg>
-        <pc:spChg chg="del">
-          <ac:chgData name="Xin Zou" userId="260b9726081dae15" providerId="LiveId" clId="{FE08A991-EB5C-498E-983D-97A2BE0F5BFB}" dt="2018-10-04T04:28:32.050" v="7726"/>
-          <ac:spMkLst>
-            <pc:docMk/>
-            <pc:sldMk cId="852070667" sldId="312"/>
-            <ac:spMk id="3" creationId="{674B5CC8-21A6-4013-BA0A-C81D769547E6}"/>
-          </ac:spMkLst>
-        </pc:spChg>
-        <pc:spChg chg="add mod">
-          <ac:chgData name="Xin Zou" userId="260b9726081dae15" providerId="LiveId" clId="{FE08A991-EB5C-498E-983D-97A2BE0F5BFB}" dt="2018-10-04T04:45:09.445" v="8299"/>
-          <ac:spMkLst>
-            <pc:docMk/>
-            <pc:sldMk cId="852070667" sldId="312"/>
-            <ac:spMk id="8" creationId="{7EFD9301-16B7-4DB9-BE5C-86698CD44A14}"/>
-          </ac:spMkLst>
-        </pc:spChg>
-        <pc:picChg chg="add mod">
-          <ac:chgData name="Xin Zou" userId="260b9726081dae15" providerId="LiveId" clId="{FE08A991-EB5C-498E-983D-97A2BE0F5BFB}" dt="2018-10-04T04:28:44.167" v="7730" actId="14100"/>
-          <ac:picMkLst>
-            <pc:docMk/>
-            <pc:sldMk cId="852070667" sldId="312"/>
-            <ac:picMk id="5" creationId="{9B6DC81D-1AF6-41E5-BF33-87EE08AB62DC}"/>
-          </ac:picMkLst>
-        </pc:picChg>
-        <pc:picChg chg="add mod">
-          <ac:chgData name="Xin Zou" userId="260b9726081dae15" providerId="LiveId" clId="{FE08A991-EB5C-498E-983D-97A2BE0F5BFB}" dt="2018-10-04T04:29:09.313" v="7737" actId="1076"/>
-          <ac:picMkLst>
-            <pc:docMk/>
-            <pc:sldMk cId="852070667" sldId="312"/>
-            <ac:picMk id="7" creationId="{CF7246D8-CDB3-458A-9C98-2C4163664A29}"/>
-          </ac:picMkLst>
-        </pc:picChg>
-        <pc:picChg chg="add del mod">
-          <ac:chgData name="Xin Zou" userId="260b9726081dae15" providerId="LiveId" clId="{FE08A991-EB5C-498E-983D-97A2BE0F5BFB}" dt="2018-10-04T04:42:17.668" v="8203" actId="478"/>
-          <ac:picMkLst>
-            <pc:docMk/>
-            <pc:sldMk cId="852070667" sldId="312"/>
-            <ac:picMk id="10" creationId="{A0CE4B9C-27AB-4AC4-A860-FDD3CAC6E496}"/>
-          </ac:picMkLst>
-        </pc:picChg>
       </pc:sldChg>
       <pc:sldChg chg="addSp modSp add">
         <pc:chgData name="Xin Zou" userId="260b9726081dae15" providerId="LiveId" clId="{FE08A991-EB5C-498E-983D-97A2BE0F5BFB}" dt="2018-10-08T05:43:24.447" v="9120" actId="27636"/>
@@ -1130,30 +513,6 @@
           <pc:docMk/>
           <pc:sldMk cId="4114594668" sldId="313"/>
         </pc:sldMkLst>
-        <pc:spChg chg="mod">
-          <ac:chgData name="Xin Zou" userId="260b9726081dae15" providerId="LiveId" clId="{FE08A991-EB5C-498E-983D-97A2BE0F5BFB}" dt="2018-10-04T04:57:25.096" v="8455"/>
-          <ac:spMkLst>
-            <pc:docMk/>
-            <pc:sldMk cId="4114594668" sldId="313"/>
-            <ac:spMk id="2" creationId="{EB5EBCE9-2E20-4101-BCFE-AC298CC1B610}"/>
-          </ac:spMkLst>
-        </pc:spChg>
-        <pc:spChg chg="mod">
-          <ac:chgData name="Xin Zou" userId="260b9726081dae15" providerId="LiveId" clId="{FE08A991-EB5C-498E-983D-97A2BE0F5BFB}" dt="2018-10-08T05:43:24.447" v="9120" actId="27636"/>
-          <ac:spMkLst>
-            <pc:docMk/>
-            <pc:sldMk cId="4114594668" sldId="313"/>
-            <ac:spMk id="3" creationId="{F876E99F-11C0-4993-8B59-8472014E7D55}"/>
-          </ac:spMkLst>
-        </pc:spChg>
-        <pc:picChg chg="add mod">
-          <ac:chgData name="Xin Zou" userId="260b9726081dae15" providerId="LiveId" clId="{FE08A991-EB5C-498E-983D-97A2BE0F5BFB}" dt="2018-10-04T05:02:05.839" v="8775" actId="1076"/>
-          <ac:picMkLst>
-            <pc:docMk/>
-            <pc:sldMk cId="4114594668" sldId="313"/>
-            <ac:picMk id="4" creationId="{25861AAB-F464-4090-8DC9-BFE6E0655A4F}"/>
-          </ac:picMkLst>
-        </pc:picChg>
       </pc:sldChg>
       <pc:sldChg chg="addSp delSp modSp add">
         <pc:chgData name="Xin Zou" userId="260b9726081dae15" providerId="LiveId" clId="{FE08A991-EB5C-498E-983D-97A2BE0F5BFB}" dt="2018-10-04T04:56:03.728" v="8437"/>
@@ -1161,46 +520,6 @@
           <pc:docMk/>
           <pc:sldMk cId="2324583193" sldId="314"/>
         </pc:sldMkLst>
-        <pc:spChg chg="mod">
-          <ac:chgData name="Xin Zou" userId="260b9726081dae15" providerId="LiveId" clId="{FE08A991-EB5C-498E-983D-97A2BE0F5BFB}" dt="2018-10-04T04:55:19.812" v="8354" actId="20577"/>
-          <ac:spMkLst>
-            <pc:docMk/>
-            <pc:sldMk cId="2324583193" sldId="314"/>
-            <ac:spMk id="2" creationId="{915E581D-1C3A-4D84-9BB3-E1E6A48645E8}"/>
-          </ac:spMkLst>
-        </pc:spChg>
-        <pc:spChg chg="del">
-          <ac:chgData name="Xin Zou" userId="260b9726081dae15" providerId="LiveId" clId="{FE08A991-EB5C-498E-983D-97A2BE0F5BFB}" dt="2018-10-04T04:52:35.240" v="8323"/>
-          <ac:spMkLst>
-            <pc:docMk/>
-            <pc:sldMk cId="2324583193" sldId="314"/>
-            <ac:spMk id="3" creationId="{B052C510-0B8D-403A-A524-3C0899D5D158}"/>
-          </ac:spMkLst>
-        </pc:spChg>
-        <pc:spChg chg="add mod">
-          <ac:chgData name="Xin Zou" userId="260b9726081dae15" providerId="LiveId" clId="{FE08A991-EB5C-498E-983D-97A2BE0F5BFB}" dt="2018-10-04T04:56:03.728" v="8437"/>
-          <ac:spMkLst>
-            <pc:docMk/>
-            <pc:sldMk cId="2324583193" sldId="314"/>
-            <ac:spMk id="7" creationId="{D4465468-0AD9-417C-9815-8E2D3AB86EDE}"/>
-          </ac:spMkLst>
-        </pc:spChg>
-        <pc:picChg chg="add mod">
-          <ac:chgData name="Xin Zou" userId="260b9726081dae15" providerId="LiveId" clId="{FE08A991-EB5C-498E-983D-97A2BE0F5BFB}" dt="2018-10-04T04:54:56.769" v="8345" actId="692"/>
-          <ac:picMkLst>
-            <pc:docMk/>
-            <pc:sldMk cId="2324583193" sldId="314"/>
-            <ac:picMk id="5" creationId="{56C10E46-038D-4453-954F-4E1ACF587B15}"/>
-          </ac:picMkLst>
-        </pc:picChg>
-        <pc:picChg chg="add mod">
-          <ac:chgData name="Xin Zou" userId="260b9726081dae15" providerId="LiveId" clId="{FE08A991-EB5C-498E-983D-97A2BE0F5BFB}" dt="2018-10-04T04:55:07.166" v="8347" actId="1076"/>
-          <ac:picMkLst>
-            <pc:docMk/>
-            <pc:sldMk cId="2324583193" sldId="314"/>
-            <ac:picMk id="6" creationId="{45334B2E-393A-4523-ACF7-68CB31302DC5}"/>
-          </ac:picMkLst>
-        </pc:picChg>
       </pc:sldChg>
       <pc:sldChg chg="addSp modSp add">
         <pc:chgData name="Xin Zou" userId="260b9726081dae15" providerId="LiveId" clId="{FE08A991-EB5C-498E-983D-97A2BE0F5BFB}" dt="2018-10-04T05:04:28.129" v="8915" actId="1076"/>
@@ -1208,30 +527,6 @@
           <pc:docMk/>
           <pc:sldMk cId="4083450557" sldId="315"/>
         </pc:sldMkLst>
-        <pc:spChg chg="mod">
-          <ac:chgData name="Xin Zou" userId="260b9726081dae15" providerId="LiveId" clId="{FE08A991-EB5C-498E-983D-97A2BE0F5BFB}" dt="2018-10-04T05:02:22.190" v="8814" actId="5793"/>
-          <ac:spMkLst>
-            <pc:docMk/>
-            <pc:sldMk cId="4083450557" sldId="315"/>
-            <ac:spMk id="2" creationId="{32419C9C-D443-489E-A0C5-7EC2B17D18AB}"/>
-          </ac:spMkLst>
-        </pc:spChg>
-        <pc:spChg chg="mod">
-          <ac:chgData name="Xin Zou" userId="260b9726081dae15" providerId="LiveId" clId="{FE08A991-EB5C-498E-983D-97A2BE0F5BFB}" dt="2018-10-04T05:04:13.745" v="8911" actId="5793"/>
-          <ac:spMkLst>
-            <pc:docMk/>
-            <pc:sldMk cId="4083450557" sldId="315"/>
-            <ac:spMk id="3" creationId="{406BD772-20A0-42CA-8865-8FBCE242C12A}"/>
-          </ac:spMkLst>
-        </pc:spChg>
-        <pc:picChg chg="add mod">
-          <ac:chgData name="Xin Zou" userId="260b9726081dae15" providerId="LiveId" clId="{FE08A991-EB5C-498E-983D-97A2BE0F5BFB}" dt="2018-10-04T05:04:28.129" v="8915" actId="1076"/>
-          <ac:picMkLst>
-            <pc:docMk/>
-            <pc:sldMk cId="4083450557" sldId="315"/>
-            <ac:picMk id="4" creationId="{CC7A7975-767A-4493-86EC-7B0A63AA8B7B}"/>
-          </ac:picMkLst>
-        </pc:picChg>
       </pc:sldChg>
       <pc:sldChg chg="modSp add">
         <pc:chgData name="Xin Zou" userId="260b9726081dae15" providerId="LiveId" clId="{FE08A991-EB5C-498E-983D-97A2BE0F5BFB}" dt="2018-10-04T05:05:49.282" v="9029" actId="15"/>
@@ -1239,22 +534,6 @@
           <pc:docMk/>
           <pc:sldMk cId="2827362311" sldId="316"/>
         </pc:sldMkLst>
-        <pc:spChg chg="mod">
-          <ac:chgData name="Xin Zou" userId="260b9726081dae15" providerId="LiveId" clId="{FE08A991-EB5C-498E-983D-97A2BE0F5BFB}" dt="2018-10-04T05:04:45.619" v="8953" actId="20577"/>
-          <ac:spMkLst>
-            <pc:docMk/>
-            <pc:sldMk cId="2827362311" sldId="316"/>
-            <ac:spMk id="2" creationId="{45D92FF8-9FC2-4C26-9C43-08F83C140D51}"/>
-          </ac:spMkLst>
-        </pc:spChg>
-        <pc:spChg chg="mod">
-          <ac:chgData name="Xin Zou" userId="260b9726081dae15" providerId="LiveId" clId="{FE08A991-EB5C-498E-983D-97A2BE0F5BFB}" dt="2018-10-04T05:05:49.282" v="9029" actId="15"/>
-          <ac:spMkLst>
-            <pc:docMk/>
-            <pc:sldMk cId="2827362311" sldId="316"/>
-            <ac:spMk id="3" creationId="{8F410D44-6CD5-4A59-973A-E621E87AF488}"/>
-          </ac:spMkLst>
-        </pc:spChg>
       </pc:sldChg>
       <pc:sldChg chg="addSp delSp modSp add">
         <pc:chgData name="Xin Zou" userId="260b9726081dae15" providerId="LiveId" clId="{FE08A991-EB5C-498E-983D-97A2BE0F5BFB}" dt="2018-10-04T05:09:40.372" v="9109" actId="1035"/>
@@ -1262,30 +541,6 @@
           <pc:docMk/>
           <pc:sldMk cId="1015395711" sldId="317"/>
         </pc:sldMkLst>
-        <pc:spChg chg="mod">
-          <ac:chgData name="Xin Zou" userId="260b9726081dae15" providerId="LiveId" clId="{FE08A991-EB5C-498E-983D-97A2BE0F5BFB}" dt="2018-10-04T05:09:14.342" v="9104"/>
-          <ac:spMkLst>
-            <pc:docMk/>
-            <pc:sldMk cId="1015395711" sldId="317"/>
-            <ac:spMk id="2" creationId="{E8E1F3B1-E8CF-412B-8E5A-F0AA062CD54D}"/>
-          </ac:spMkLst>
-        </pc:spChg>
-        <pc:spChg chg="del">
-          <ac:chgData name="Xin Zou" userId="260b9726081dae15" providerId="LiveId" clId="{FE08A991-EB5C-498E-983D-97A2BE0F5BFB}" dt="2018-10-04T05:09:16.957" v="9105"/>
-          <ac:spMkLst>
-            <pc:docMk/>
-            <pc:sldMk cId="1015395711" sldId="317"/>
-            <ac:spMk id="3" creationId="{8995AE82-A1C4-4535-AEF8-A7AD68E74BBC}"/>
-          </ac:spMkLst>
-        </pc:spChg>
-        <pc:picChg chg="add mod">
-          <ac:chgData name="Xin Zou" userId="260b9726081dae15" providerId="LiveId" clId="{FE08A991-EB5C-498E-983D-97A2BE0F5BFB}" dt="2018-10-04T05:09:40.372" v="9109" actId="1035"/>
-          <ac:picMkLst>
-            <pc:docMk/>
-            <pc:sldMk cId="1015395711" sldId="317"/>
-            <ac:picMk id="4" creationId="{BFD6E818-E535-4091-B8A3-9135B124C9F4}"/>
-          </ac:picMkLst>
-        </pc:picChg>
       </pc:sldChg>
       <pc:sldChg chg="add">
         <pc:chgData name="Xin Zou" userId="260b9726081dae15" providerId="LiveId" clId="{FE08A991-EB5C-498E-983D-97A2BE0F5BFB}" dt="2018-10-08T05:43:19.592" v="9111"/>
@@ -1309,14 +564,6 @@
           <pc:docMk/>
           <pc:sldMk cId="0" sldId="284"/>
         </pc:sldMkLst>
-        <pc:spChg chg="mod">
-          <ac:chgData name="Xin Zou" userId="260b9726081dae15" providerId="LiveId" clId="{B2671A2C-B444-47B6-830B-E020D46D4C77}" dt="2019-09-04T03:50:57.702" v="1" actId="27636"/>
-          <ac:spMkLst>
-            <pc:docMk/>
-            <pc:sldMk cId="0" sldId="284"/>
-            <ac:spMk id="3" creationId="{00000000-0000-0000-0000-000000000000}"/>
-          </ac:spMkLst>
-        </pc:spChg>
       </pc:sldChg>
       <pc:sldChg chg="modSp">
         <pc:chgData name="Xin Zou" userId="260b9726081dae15" providerId="LiveId" clId="{B2671A2C-B444-47B6-830B-E020D46D4C77}" dt="2019-09-04T03:51:24.661" v="3" actId="27636"/>
@@ -1324,14 +571,6 @@
           <pc:docMk/>
           <pc:sldMk cId="1469810937" sldId="304"/>
         </pc:sldMkLst>
-        <pc:spChg chg="mod">
-          <ac:chgData name="Xin Zou" userId="260b9726081dae15" providerId="LiveId" clId="{B2671A2C-B444-47B6-830B-E020D46D4C77}" dt="2019-09-04T03:51:24.661" v="3" actId="27636"/>
-          <ac:spMkLst>
-            <pc:docMk/>
-            <pc:sldMk cId="1469810937" sldId="304"/>
-            <ac:spMk id="3" creationId="{9F449120-2354-4B84-892E-F00A42C74A5D}"/>
-          </ac:spMkLst>
-        </pc:spChg>
       </pc:sldChg>
       <pc:sldChg chg="modSp">
         <pc:chgData name="Xin Zou" userId="260b9726081dae15" providerId="LiveId" clId="{B2671A2C-B444-47B6-830B-E020D46D4C77}" dt="2019-09-04T03:51:56.988" v="5" actId="14100"/>
@@ -1339,14 +578,6 @@
           <pc:docMk/>
           <pc:sldMk cId="3059523748" sldId="305"/>
         </pc:sldMkLst>
-        <pc:spChg chg="mod">
-          <ac:chgData name="Xin Zou" userId="260b9726081dae15" providerId="LiveId" clId="{B2671A2C-B444-47B6-830B-E020D46D4C77}" dt="2019-09-04T03:51:56.988" v="5" actId="14100"/>
-          <ac:spMkLst>
-            <pc:docMk/>
-            <pc:sldMk cId="3059523748" sldId="305"/>
-            <ac:spMk id="3" creationId="{62EB2482-9CFE-4BA5-87D1-6F24EB602CB8}"/>
-          </ac:spMkLst>
-        </pc:spChg>
       </pc:sldChg>
       <pc:sldChg chg="modSp">
         <pc:chgData name="Xin Zou" userId="260b9726081dae15" providerId="LiveId" clId="{B2671A2C-B444-47B6-830B-E020D46D4C77}" dt="2019-09-04T03:52:05.887" v="6" actId="1076"/>
@@ -1354,14 +585,6 @@
           <pc:docMk/>
           <pc:sldMk cId="1735068261" sldId="306"/>
         </pc:sldMkLst>
-        <pc:picChg chg="mod">
-          <ac:chgData name="Xin Zou" userId="260b9726081dae15" providerId="LiveId" clId="{B2671A2C-B444-47B6-830B-E020D46D4C77}" dt="2019-09-04T03:52:05.887" v="6" actId="1076"/>
-          <ac:picMkLst>
-            <pc:docMk/>
-            <pc:sldMk cId="1735068261" sldId="306"/>
-            <ac:picMk id="4" creationId="{75463CFF-537B-43C4-9208-178321B74503}"/>
-          </ac:picMkLst>
-        </pc:picChg>
       </pc:sldChg>
       <pc:sldChg chg="modSp">
         <pc:chgData name="Xin Zou" userId="260b9726081dae15" providerId="LiveId" clId="{B2671A2C-B444-47B6-830B-E020D46D4C77}" dt="2019-09-04T03:53:25.103" v="18" actId="13926"/>
@@ -1369,14 +592,6 @@
           <pc:docMk/>
           <pc:sldMk cId="1647869658" sldId="308"/>
         </pc:sldMkLst>
-        <pc:spChg chg="mod">
-          <ac:chgData name="Xin Zou" userId="260b9726081dae15" providerId="LiveId" clId="{B2671A2C-B444-47B6-830B-E020D46D4C77}" dt="2019-09-04T03:53:25.103" v="18" actId="13926"/>
-          <ac:spMkLst>
-            <pc:docMk/>
-            <pc:sldMk cId="1647869658" sldId="308"/>
-            <ac:spMk id="3" creationId="{3953811D-FB60-4427-9B84-943EB8BDA8CD}"/>
-          </ac:spMkLst>
-        </pc:spChg>
       </pc:sldChg>
     </pc:docChg>
   </pc:docChgLst>
@@ -1466,7 +681,7 @@
             <a:fld id="{E4B1B442-110D-40F1-A0D3-D0D26DD945CA}" type="datetimeFigureOut">
               <a:rPr lang="en-US" smtClean="0"/>
               <a:pPr/>
-              <a:t>9/4/2019</a:t>
+              <a:t>10/15/2025</a:t>
             </a:fld>
             <a:endParaRPr lang="en-US"/>
           </a:p>
@@ -3353,7 +2568,7 @@
           <a:p>
             <a:fld id="{48A87A34-81AB-432B-8DAE-1953F412C126}" type="datetimeFigureOut">
               <a:rPr lang="en-US" smtClean="0"/>
-              <a:t>9/4/2019</a:t>
+              <a:t>10/15/2025</a:t>
             </a:fld>
             <a:endParaRPr lang="en-US" dirty="0"/>
           </a:p>
@@ -3635,7 +2850,7 @@
             <a:fld id="{48A87A34-81AB-432B-8DAE-1953F412C126}" type="datetimeFigureOut">
               <a:rPr lang="en-US" smtClean="0"/>
               <a:pPr/>
-              <a:t>9/4/2019</a:t>
+              <a:t>10/15/2025</a:t>
             </a:fld>
             <a:endParaRPr lang="en-US" dirty="0"/>
           </a:p>
@@ -3829,7 +3044,7 @@
             <a:fld id="{48A87A34-81AB-432B-8DAE-1953F412C126}" type="datetimeFigureOut">
               <a:rPr lang="en-US" smtClean="0"/>
               <a:pPr/>
-              <a:t>9/4/2019</a:t>
+              <a:t>10/15/2025</a:t>
             </a:fld>
             <a:endParaRPr lang="en-US" dirty="0"/>
           </a:p>
@@ -4092,7 +3307,7 @@
             <a:fld id="{48A87A34-81AB-432B-8DAE-1953F412C126}" type="datetimeFigureOut">
               <a:rPr lang="en-US" smtClean="0"/>
               <a:pPr/>
-              <a:t>9/4/2019</a:t>
+              <a:t>10/15/2025</a:t>
             </a:fld>
             <a:endParaRPr lang="en-US" dirty="0"/>
           </a:p>
@@ -4520,7 +3735,7 @@
             <a:fld id="{48A87A34-81AB-432B-8DAE-1953F412C126}" type="datetimeFigureOut">
               <a:rPr lang="en-US" smtClean="0"/>
               <a:pPr/>
-              <a:t>9/4/2019</a:t>
+              <a:t>10/15/2025</a:t>
             </a:fld>
             <a:endParaRPr lang="en-US" dirty="0"/>
           </a:p>
@@ -5068,7 +4283,7 @@
             <a:fld id="{48A87A34-81AB-432B-8DAE-1953F412C126}" type="datetimeFigureOut">
               <a:rPr lang="en-US" smtClean="0"/>
               <a:pPr/>
-              <a:t>9/4/2019</a:t>
+              <a:t>10/15/2025</a:t>
             </a:fld>
             <a:endParaRPr lang="en-US" dirty="0"/>
           </a:p>
@@ -5901,7 +5116,7 @@
             <a:fld id="{48A87A34-81AB-432B-8DAE-1953F412C126}" type="datetimeFigureOut">
               <a:rPr lang="en-US" smtClean="0"/>
               <a:pPr/>
-              <a:t>9/4/2019</a:t>
+              <a:t>10/15/2025</a:t>
             </a:fld>
             <a:endParaRPr lang="en-US" dirty="0"/>
           </a:p>
@@ -6072,7 +5287,7 @@
           <a:p>
             <a:fld id="{48A87A34-81AB-432B-8DAE-1953F412C126}" type="datetimeFigureOut">
               <a:rPr lang="en-US" smtClean="0"/>
-              <a:t>9/4/2019</a:t>
+              <a:t>10/15/2025</a:t>
             </a:fld>
             <a:endParaRPr lang="en-US" dirty="0"/>
           </a:p>
@@ -6252,7 +5467,7 @@
           <a:p>
             <a:fld id="{48A87A34-81AB-432B-8DAE-1953F412C126}" type="datetimeFigureOut">
               <a:rPr lang="en-US" smtClean="0"/>
-              <a:t>9/4/2019</a:t>
+              <a:t>10/15/2025</a:t>
             </a:fld>
             <a:endParaRPr lang="en-US" dirty="0"/>
           </a:p>
@@ -6422,7 +5637,7 @@
           <a:p>
             <a:fld id="{48A87A34-81AB-432B-8DAE-1953F412C126}" type="datetimeFigureOut">
               <a:rPr lang="en-US" smtClean="0"/>
-              <a:t>9/4/2019</a:t>
+              <a:t>10/15/2025</a:t>
             </a:fld>
             <a:endParaRPr lang="en-US" dirty="0"/>
           </a:p>
@@ -6679,7 +5894,7 @@
           <a:p>
             <a:fld id="{48A87A34-81AB-432B-8DAE-1953F412C126}" type="datetimeFigureOut">
               <a:rPr lang="en-US" smtClean="0"/>
-              <a:t>9/4/2019</a:t>
+              <a:t>10/15/2025</a:t>
             </a:fld>
             <a:endParaRPr lang="en-US" dirty="0"/>
           </a:p>
@@ -6911,7 +6126,7 @@
           <a:p>
             <a:fld id="{48A87A34-81AB-432B-8DAE-1953F412C126}" type="datetimeFigureOut">
               <a:rPr lang="en-US" smtClean="0"/>
-              <a:t>9/4/2019</a:t>
+              <a:t>10/15/2025</a:t>
             </a:fld>
             <a:endParaRPr lang="en-US" dirty="0"/>
           </a:p>
@@ -7304,7 +6519,7 @@
           <a:p>
             <a:fld id="{48A87A34-81AB-432B-8DAE-1953F412C126}" type="datetimeFigureOut">
               <a:rPr lang="en-US" smtClean="0"/>
-              <a:t>9/4/2019</a:t>
+              <a:t>10/15/2025</a:t>
             </a:fld>
             <a:endParaRPr lang="en-US" dirty="0"/>
           </a:p>
@@ -7422,7 +6637,7 @@
           <a:p>
             <a:fld id="{48A87A34-81AB-432B-8DAE-1953F412C126}" type="datetimeFigureOut">
               <a:rPr lang="en-US" smtClean="0"/>
-              <a:t>9/4/2019</a:t>
+              <a:t>10/15/2025</a:t>
             </a:fld>
             <a:endParaRPr lang="en-US" dirty="0"/>
           </a:p>
@@ -7517,7 +6732,7 @@
           <a:p>
             <a:fld id="{48A87A34-81AB-432B-8DAE-1953F412C126}" type="datetimeFigureOut">
               <a:rPr lang="en-US" smtClean="0"/>
-              <a:t>9/4/2019</a:t>
+              <a:t>10/15/2025</a:t>
             </a:fld>
             <a:endParaRPr lang="en-US" dirty="0"/>
           </a:p>
@@ -7790,7 +7005,7 @@
           <a:p>
             <a:fld id="{48A87A34-81AB-432B-8DAE-1953F412C126}" type="datetimeFigureOut">
               <a:rPr lang="en-US" smtClean="0"/>
-              <a:t>9/4/2019</a:t>
+              <a:t>10/15/2025</a:t>
             </a:fld>
             <a:endParaRPr lang="en-US" dirty="0"/>
           </a:p>
@@ -8071,7 +7286,7 @@
           <a:p>
             <a:fld id="{48A87A34-81AB-432B-8DAE-1953F412C126}" type="datetimeFigureOut">
               <a:rPr lang="en-US" smtClean="0"/>
-              <a:t>9/4/2019</a:t>
+              <a:t>10/15/2025</a:t>
             </a:fld>
             <a:endParaRPr lang="en-US" dirty="0"/>
           </a:p>
@@ -8312,7 +7527,7 @@
             <a:fld id="{48A87A34-81AB-432B-8DAE-1953F412C126}" type="datetimeFigureOut">
               <a:rPr lang="en-US" smtClean="0"/>
               <a:pPr/>
-              <a:t>9/4/2019</a:t>
+              <a:t>10/15/2025</a:t>
             </a:fld>
             <a:endParaRPr lang="en-US" dirty="0"/>
           </a:p>
@@ -15371,7 +14586,7 @@
             </a:r>
             <a:r>
               <a:rPr lang="zh-CN" altLang="en-US" dirty="0"/>
-              <a:t>标准方差</a:t>
+              <a:t>标准差</a:t>
             </a:r>
             <a:endParaRPr lang="en-US" dirty="0"/>
           </a:p>
@@ -19286,7 +18501,7 @@
           <a:p>
             <a:r>
               <a:rPr lang="zh-CN" altLang="en-US" dirty="0"/>
-              <a:t>专和精的关系</a:t>
+              <a:t>专和广的关系</a:t>
             </a:r>
             <a:endParaRPr lang="en-US" dirty="0"/>
           </a:p>
@@ -26118,21 +25333,6 @@
 </file>
 
 <file path=customXml/item1.xml><?xml version="1.0" encoding="utf-8"?>
-<p:properties xmlns:p="http://schemas.microsoft.com/office/2006/metadata/properties" xmlns:xsi="http://www.w3.org/2001/XMLSchema-instance" xmlns:pc="http://schemas.microsoft.com/office/infopath/2007/PartnerControls">
-  <documentManagement/>
-</p:properties>
-</file>
-
-<file path=customXml/item2.xml><?xml version="1.0" encoding="utf-8"?>
-<?mso-contentType ?>
-<FormTemplates xmlns="http://schemas.microsoft.com/sharepoint/v3/contenttype/forms">
-  <Display>DocumentLibraryForm</Display>
-  <Edit>DocumentLibraryForm</Edit>
-  <New>DocumentLibraryForm</New>
-</FormTemplates>
-</file>
-
-<file path=customXml/item3.xml><?xml version="1.0" encoding="utf-8"?>
 <ct:contentTypeSchema xmlns:ct="http://schemas.microsoft.com/office/2006/metadata/contentType" xmlns:ma="http://schemas.microsoft.com/office/2006/metadata/properties/metaAttributes" ct:_="" ma:_="" ma:contentTypeName="Document" ma:contentTypeID="0x0101006371182FA640024E8A2815D490E1EF25" ma:contentTypeVersion="0" ma:contentTypeDescription="Create a new document." ma:contentTypeScope="" ma:versionID="3591aab47f172a2900f307f59d422227">
   <xsd:schema xmlns:xsd="http://www.w3.org/2001/XMLSchema" xmlns:xs="http://www.w3.org/2001/XMLSchema" xmlns:p="http://schemas.microsoft.com/office/2006/metadata/properties" targetNamespace="http://schemas.microsoft.com/office/2006/metadata/properties" ma:root="true" ma:fieldsID="1f28ea01430cdfb20a10736313f817e3">
     <xsd:element name="properties">
@@ -26246,24 +25446,22 @@
 </ct:contentTypeSchema>
 </file>
 
-<file path=customXml/itemProps1.xml><?xml version="1.0" encoding="utf-8"?>
-<ds:datastoreItem xmlns:ds="http://schemas.openxmlformats.org/officeDocument/2006/customXml" ds:itemID="{AC38B70B-68EE-413F-8243-C962F94ACA64}">
-  <ds:schemaRefs>
-    <ds:schemaRef ds:uri="http://schemas.microsoft.com/office/2006/metadata/properties"/>
-    <ds:schemaRef ds:uri="http://schemas.microsoft.com/office/infopath/2007/PartnerControls"/>
-  </ds:schemaRefs>
-</ds:datastoreItem>
+<file path=customXml/item2.xml><?xml version="1.0" encoding="utf-8"?>
+<p:properties xmlns:p="http://schemas.microsoft.com/office/2006/metadata/properties" xmlns:xsi="http://www.w3.org/2001/XMLSchema-instance" xmlns:pc="http://schemas.microsoft.com/office/infopath/2007/PartnerControls">
+  <documentManagement/>
+</p:properties>
 </file>
 
-<file path=customXml/itemProps2.xml><?xml version="1.0" encoding="utf-8"?>
-<ds:datastoreItem xmlns:ds="http://schemas.openxmlformats.org/officeDocument/2006/customXml" ds:itemID="{8768B0E8-F7C4-4929-B0A1-8ECCA4ABBF95}">
-  <ds:schemaRefs>
-    <ds:schemaRef ds:uri="http://schemas.microsoft.com/sharepoint/v3/contenttype/forms"/>
-  </ds:schemaRefs>
-</ds:datastoreItem>
+<file path=customXml/item3.xml><?xml version="1.0" encoding="utf-8"?>
+<?mso-contentType ?>
+<FormTemplates xmlns="http://schemas.microsoft.com/sharepoint/v3/contenttype/forms">
+  <Display>DocumentLibraryForm</Display>
+  <Edit>DocumentLibraryForm</Edit>
+  <New>DocumentLibraryForm</New>
+</FormTemplates>
 </file>
 
-<file path=customXml/itemProps3.xml><?xml version="1.0" encoding="utf-8"?>
+<file path=customXml/itemProps1.xml><?xml version="1.0" encoding="utf-8"?>
 <ds:datastoreItem xmlns:ds="http://schemas.openxmlformats.org/officeDocument/2006/customXml" ds:itemID="{B3B0C391-DDE3-4D99-8DB2-DCB9F2C70771}">
   <ds:schemaRefs>
     <ds:schemaRef ds:uri="http://schemas.microsoft.com/office/2006/metadata/contentType"/>
@@ -26277,4 +25475,21 @@
     <ds:schemaRef ds:uri="http://schemas.microsoft.com/office/infopath/2007/PartnerControls"/>
   </ds:schemaRefs>
 </ds:datastoreItem>
+</file>
+
+<file path=customXml/itemProps2.xml><?xml version="1.0" encoding="utf-8"?>
+<ds:datastoreItem xmlns:ds="http://schemas.openxmlformats.org/officeDocument/2006/customXml" ds:itemID="{AC38B70B-68EE-413F-8243-C962F94ACA64}">
+  <ds:schemaRefs>
+    <ds:schemaRef ds:uri="http://schemas.microsoft.com/office/2006/metadata/properties"/>
+    <ds:schemaRef ds:uri="http://schemas.microsoft.com/office/infopath/2007/PartnerControls"/>
+  </ds:schemaRefs>
+</ds:datastoreItem>
+</file>
+
+<file path=customXml/itemProps3.xml><?xml version="1.0" encoding="utf-8"?>
+<ds:datastoreItem xmlns:ds="http://schemas.openxmlformats.org/officeDocument/2006/customXml" ds:itemID="{8768B0E8-F7C4-4929-B0A1-8ECCA4ABBF95}">
+  <ds:schemaRefs>
+    <ds:schemaRef ds:uri="http://schemas.microsoft.com/sharepoint/v3/contenttype/forms"/>
+  </ds:schemaRefs>
+</ds:datastoreItem>
 </file>